--- a/양식/사진폼.pptx
+++ b/양식/사진폼.pptx
@@ -104,6 +104,22 @@
       </a:defRPr>
     </a:lvl9pPr>
   </p:defaultTextStyle>
+  <p:extLst>
+    <p:ext uri="{EFAFB233-063F-42B5-8137-9DF3F51BA10A}">
+      <p15:sldGuideLst xmlns:p15="http://schemas.microsoft.com/office/powerpoint/2012/main">
+        <p15:guide id="1" orient="horz" pos="3120">
+          <p15:clr>
+            <a:srgbClr val="A4A3A4"/>
+          </p15:clr>
+        </p15:guide>
+        <p15:guide id="2" pos="2160">
+          <p15:clr>
+            <a:srgbClr val="A4A3A4"/>
+          </p15:clr>
+        </p15:guide>
+      </p15:sldGuideLst>
+    </p:ext>
+  </p:extLst>
 </p:presentation>
 </file>
 
@@ -288,7 +304,7 @@
           <a:p>
             <a:fld id="{0C303903-F653-4C89-995E-2E3561D73305}" type="datetimeFigureOut">
               <a:rPr lang="ko-KR" altLang="en-US" smtClean="0"/>
-              <a:t>2026-03-28</a:t>
+              <a:t>2026-04-18</a:t>
             </a:fld>
             <a:endParaRPr lang="ko-KR" altLang="en-US"/>
           </a:p>
@@ -458,7 +474,7 @@
           <a:p>
             <a:fld id="{0C303903-F653-4C89-995E-2E3561D73305}" type="datetimeFigureOut">
               <a:rPr lang="ko-KR" altLang="en-US" smtClean="0"/>
-              <a:t>2026-03-28</a:t>
+              <a:t>2026-04-18</a:t>
             </a:fld>
             <a:endParaRPr lang="ko-KR" altLang="en-US"/>
           </a:p>
@@ -638,7 +654,7 @@
           <a:p>
             <a:fld id="{0C303903-F653-4C89-995E-2E3561D73305}" type="datetimeFigureOut">
               <a:rPr lang="ko-KR" altLang="en-US" smtClean="0"/>
-              <a:t>2026-03-28</a:t>
+              <a:t>2026-04-18</a:t>
             </a:fld>
             <a:endParaRPr lang="ko-KR" altLang="en-US"/>
           </a:p>
@@ -808,7 +824,7 @@
           <a:p>
             <a:fld id="{0C303903-F653-4C89-995E-2E3561D73305}" type="datetimeFigureOut">
               <a:rPr lang="ko-KR" altLang="en-US" smtClean="0"/>
-              <a:t>2026-03-28</a:t>
+              <a:t>2026-04-18</a:t>
             </a:fld>
             <a:endParaRPr lang="ko-KR" altLang="en-US"/>
           </a:p>
@@ -1054,7 +1070,7 @@
           <a:p>
             <a:fld id="{0C303903-F653-4C89-995E-2E3561D73305}" type="datetimeFigureOut">
               <a:rPr lang="ko-KR" altLang="en-US" smtClean="0"/>
-              <a:t>2026-03-28</a:t>
+              <a:t>2026-04-18</a:t>
             </a:fld>
             <a:endParaRPr lang="ko-KR" altLang="en-US"/>
           </a:p>
@@ -1342,7 +1358,7 @@
           <a:p>
             <a:fld id="{0C303903-F653-4C89-995E-2E3561D73305}" type="datetimeFigureOut">
               <a:rPr lang="ko-KR" altLang="en-US" smtClean="0"/>
-              <a:t>2026-03-28</a:t>
+              <a:t>2026-04-18</a:t>
             </a:fld>
             <a:endParaRPr lang="ko-KR" altLang="en-US"/>
           </a:p>
@@ -1769,7 +1785,7 @@
           <a:p>
             <a:fld id="{0C303903-F653-4C89-995E-2E3561D73305}" type="datetimeFigureOut">
               <a:rPr lang="ko-KR" altLang="en-US" smtClean="0"/>
-              <a:t>2026-03-28</a:t>
+              <a:t>2026-04-18</a:t>
             </a:fld>
             <a:endParaRPr lang="ko-KR" altLang="en-US"/>
           </a:p>
@@ -1887,7 +1903,7 @@
           <a:p>
             <a:fld id="{0C303903-F653-4C89-995E-2E3561D73305}" type="datetimeFigureOut">
               <a:rPr lang="ko-KR" altLang="en-US" smtClean="0"/>
-              <a:t>2026-03-28</a:t>
+              <a:t>2026-04-18</a:t>
             </a:fld>
             <a:endParaRPr lang="ko-KR" altLang="en-US"/>
           </a:p>
@@ -1982,7 +1998,7 @@
           <a:p>
             <a:fld id="{0C303903-F653-4C89-995E-2E3561D73305}" type="datetimeFigureOut">
               <a:rPr lang="ko-KR" altLang="en-US" smtClean="0"/>
-              <a:t>2026-03-28</a:t>
+              <a:t>2026-04-18</a:t>
             </a:fld>
             <a:endParaRPr lang="ko-KR" altLang="en-US"/>
           </a:p>
@@ -2259,7 +2275,7 @@
           <a:p>
             <a:fld id="{0C303903-F653-4C89-995E-2E3561D73305}" type="datetimeFigureOut">
               <a:rPr lang="ko-KR" altLang="en-US" smtClean="0"/>
-              <a:t>2026-03-28</a:t>
+              <a:t>2026-04-18</a:t>
             </a:fld>
             <a:endParaRPr lang="ko-KR" altLang="en-US"/>
           </a:p>
@@ -2512,7 +2528,7 @@
           <a:p>
             <a:fld id="{0C303903-F653-4C89-995E-2E3561D73305}" type="datetimeFigureOut">
               <a:rPr lang="ko-KR" altLang="en-US" smtClean="0"/>
-              <a:t>2026-03-28</a:t>
+              <a:t>2026-04-18</a:t>
             </a:fld>
             <a:endParaRPr lang="ko-KR" altLang="en-US"/>
           </a:p>
@@ -2725,7 +2741,7 @@
           <a:p>
             <a:fld id="{0C303903-F653-4C89-995E-2E3561D73305}" type="datetimeFigureOut">
               <a:rPr lang="ko-KR" altLang="en-US" smtClean="0"/>
-              <a:t>2026-03-28</a:t>
+              <a:t>2026-04-18</a:t>
             </a:fld>
             <a:endParaRPr lang="ko-KR" altLang="en-US"/>
           </a:p>
@@ -3162,15 +3178,15 @@
           <a:lstStyle/>
           <a:p>
             <a:r>
-              <a:rPr lang="ko-KR" altLang="en-US" b="1" smtClean="0"/>
-              <a:t>충청</a:t>
-            </a:r>
-            <a:r>
-              <a:rPr lang="ko-KR" altLang="en-US" b="1" smtClean="0"/>
+              <a:rPr lang="ko-KR" altLang="en-US" b="1" dirty="0" err="1" smtClean="0"/>
+              <a:t>강남</a:t>
+            </a:r>
+            <a:r>
+              <a:rPr lang="ko-KR" altLang="en-US" b="1" dirty="0" err="1" smtClean="0"/>
               <a:t>지사</a:t>
             </a:r>
             <a:r>
-              <a:rPr lang="ko-KR" altLang="en-US" smtClean="0"/>
+              <a:rPr lang="ko-KR" altLang="en-US" dirty="0" smtClean="0"/>
               <a:t> </a:t>
             </a:r>
             <a:r>

--- a/양식/사진폼.pptx
+++ b/양식/사진폼.pptx
@@ -106,7 +106,7 @@
   </p:defaultTextStyle>
   <p:extLst>
     <p:ext uri="{EFAFB233-063F-42B5-8137-9DF3F51BA10A}">
-      <p15:sldGuideLst xmlns:p15="http://schemas.microsoft.com/office/powerpoint/2012/main">
+      <p15:sldGuideLst xmlns="" xmlns:p15="http://schemas.microsoft.com/office/powerpoint/2012/main">
         <p15:guide id="1" orient="horz" pos="3120">
           <p15:clr>
             <a:srgbClr val="A4A3A4"/>
@@ -3178,12 +3178,8 @@
           <a:lstStyle/>
           <a:p>
             <a:r>
-              <a:rPr lang="ko-KR" altLang="en-US" b="1" dirty="0" err="1" smtClean="0"/>
-              <a:t>강남</a:t>
-            </a:r>
-            <a:r>
-              <a:rPr lang="ko-KR" altLang="en-US" b="1" dirty="0" err="1" smtClean="0"/>
-              <a:t>지사</a:t>
+              <a:rPr lang="ko-KR" altLang="en-US" b="1" dirty="0" smtClean="0"/>
+              <a:t>강원지사</a:t>
             </a:r>
             <a:r>
               <a:rPr lang="ko-KR" altLang="en-US" dirty="0" smtClean="0"/>
